--- a/media/resources/files/EkiOrunduuOnduktar_KoshuuKemituuJenilOrtoOor_ABcMBbj.pptx
+++ b/media/resources/files/EkiOrunduuOnduktar_KoshuuKemituuJenilOrtoOor_ABcMBbj.pptx
@@ -2125,14 +2125,14 @@
             <a:pPr algn="r"/>
             <a:r>
               <a:rPr lang="en-GB" sz="2400" spc="300" dirty="0"/>
-              <a:t>0.21</a:t>
+              <a:t>0,21</a:t>
             </a:r>
           </a:p>
           <a:p>
             <a:pPr algn="r"/>
             <a:r>
               <a:rPr lang="en-GB" sz="2400" spc="300" dirty="0"/>
-              <a:t>+  0.04</a:t>
+              <a:t>+  0,04</a:t>
             </a:r>
           </a:p>
         </p:txBody>
@@ -2254,14 +2254,14 @@
             <a:pPr algn="r"/>
             <a:r>
               <a:rPr lang="en-GB" sz="2400" spc="300" dirty="0"/>
-              <a:t>0.67</a:t>
+              <a:t>0,67</a:t>
             </a:r>
           </a:p>
           <a:p>
             <a:pPr algn="r"/>
             <a:r>
               <a:rPr lang="en-GB" sz="2400" spc="300" dirty="0"/>
-              <a:t>−  0.11</a:t>
+              <a:t>−  0,11</a:t>
             </a:r>
           </a:p>
         </p:txBody>
@@ -2383,14 +2383,14 @@
             <a:pPr algn="r"/>
             <a:r>
               <a:rPr lang="en-GB" sz="2400" spc="300" dirty="0"/>
-              <a:t>1.24</a:t>
+              <a:t>1,24</a:t>
             </a:r>
           </a:p>
           <a:p>
             <a:pPr algn="r"/>
             <a:r>
               <a:rPr lang="en-GB" sz="2400" spc="300" dirty="0"/>
-              <a:t>+  1.53</a:t>
+              <a:t>+  1,53</a:t>
             </a:r>
           </a:p>
         </p:txBody>
@@ -2512,14 +2512,14 @@
             <a:pPr algn="r"/>
             <a:r>
               <a:rPr lang="en-GB" sz="2400" spc="300" dirty="0"/>
-              <a:t>0.43</a:t>
+              <a:t>0,43</a:t>
             </a:r>
           </a:p>
           <a:p>
             <a:pPr algn="r"/>
             <a:r>
               <a:rPr lang="en-GB" sz="2400" spc="300" dirty="0"/>
-              <a:t>−  0.25</a:t>
+              <a:t>−  0,25</a:t>
             </a:r>
           </a:p>
         </p:txBody>
@@ -2678,7 +2678,7 @@
             <a:pPr algn="r"/>
             <a:r>
               <a:rPr lang="en-GB" sz="2400" dirty="0"/>
-              <a:t>0.35 + 0.38</a:t>
+              <a:t>0,35 + 0,38</a:t>
             </a:r>
           </a:p>
         </p:txBody>
@@ -2755,7 +2755,7 @@
             <a:pPr algn="r"/>
             <a:r>
               <a:rPr lang="en-GB" sz="2400" dirty="0"/>
-              <a:t>0.28 + 0.5 + 0.04</a:t>
+              <a:t>0,28 + 0,5 + 0,04</a:t>
             </a:r>
           </a:p>
         </p:txBody>
@@ -2832,7 +2832,7 @@
             <a:pPr algn="r"/>
             <a:r>
               <a:rPr lang="en-GB" sz="2400" dirty="0"/>
-              <a:t>1.63 − 0.48</a:t>
+              <a:t>1,63 − 0,48</a:t>
             </a:r>
           </a:p>
         </p:txBody>
@@ -2909,7 +2909,7 @@
             <a:pPr algn="r"/>
             <a:r>
               <a:rPr lang="en-GB" sz="2400" dirty="0"/>
-              <a:t>2.32 − 1.54</a:t>
+              <a:t>2,32 − 1,54</a:t>
             </a:r>
           </a:p>
         </p:txBody>
@@ -2986,7 +2986,7 @@
             <a:pPr algn="r"/>
             <a:r>
               <a:rPr lang="en-GB" sz="2400" dirty="0"/>
-              <a:t>4.25 − 1.48 + 0.2</a:t>
+              <a:t>4,25 − 1,48 + 0,2</a:t>
             </a:r>
           </a:p>
         </p:txBody>
@@ -3091,7 +3091,7 @@
                   <a:schemeClr val="tx1"/>
                 </a:solidFill>
               </a:rPr>
-              <a:t>4.91</a:t>
+              <a:t>4,91</a:t>
             </a:r>
           </a:p>
         </p:txBody>
@@ -3160,7 +3160,7 @@
                   <a:schemeClr val="tx1"/>
                 </a:solidFill>
               </a:rPr>
-              <a:t>2.17</a:t>
+              <a:t>2,17</a:t>
             </a:r>
           </a:p>
         </p:txBody>
@@ -3602,7 +3602,7 @@
                   <a:schemeClr val="tx1"/>
                 </a:solidFill>
               </a:rPr>
-              <a:t>6.71</a:t>
+              <a:t>6,71</a:t>
             </a:r>
           </a:p>
         </p:txBody>
@@ -3671,7 +3671,7 @@
                   <a:schemeClr val="tx1"/>
                 </a:solidFill>
               </a:rPr>
-              <a:t>2.86</a:t>
+              <a:t>2,86</a:t>
             </a:r>
           </a:p>
         </p:txBody>
@@ -4511,14 +4511,14 @@
             <a:pPr algn="r"/>
             <a:r>
               <a:rPr lang="en-GB" sz="2400" spc="300" dirty="0"/>
-              <a:t>0.21</a:t>
+              <a:t>0,21</a:t>
             </a:r>
           </a:p>
           <a:p>
             <a:pPr algn="r"/>
             <a:r>
               <a:rPr lang="en-GB" sz="2400" spc="300" dirty="0"/>
-              <a:t>+  0.04</a:t>
+              <a:t>+  0,04</a:t>
             </a:r>
           </a:p>
         </p:txBody>
@@ -4606,7 +4606,7 @@
             <a:pPr algn="ctr"/>
             <a:r>
               <a:rPr lang="en-GB" sz="2400" spc="300" dirty="0"/>
-              <a:t>0.25</a:t>
+              <a:t>0,25</a:t>
             </a:r>
           </a:p>
         </p:txBody>
@@ -4683,14 +4683,14 @@
             <a:pPr algn="r"/>
             <a:r>
               <a:rPr lang="en-GB" sz="2400" spc="300" dirty="0"/>
-              <a:t>0.67</a:t>
+              <a:t>0,67</a:t>
             </a:r>
           </a:p>
           <a:p>
             <a:pPr algn="r"/>
             <a:r>
               <a:rPr lang="en-GB" sz="2400" spc="300" dirty="0"/>
-              <a:t>−  0.11</a:t>
+              <a:t>−  0,11</a:t>
             </a:r>
           </a:p>
         </p:txBody>
@@ -4778,7 +4778,7 @@
             <a:pPr algn="ctr"/>
             <a:r>
               <a:rPr lang="en-GB" sz="2400" spc="300" dirty="0"/>
-              <a:t>0.56</a:t>
+              <a:t>0,56</a:t>
             </a:r>
           </a:p>
         </p:txBody>
@@ -4855,14 +4855,14 @@
             <a:pPr algn="r"/>
             <a:r>
               <a:rPr lang="en-GB" sz="2400" spc="300" dirty="0"/>
-              <a:t>1.24</a:t>
+              <a:t>1,24</a:t>
             </a:r>
           </a:p>
           <a:p>
             <a:pPr algn="r"/>
             <a:r>
               <a:rPr lang="en-GB" sz="2400" spc="300" dirty="0"/>
-              <a:t>+  1.53</a:t>
+              <a:t>+  1,53</a:t>
             </a:r>
           </a:p>
         </p:txBody>
@@ -4950,7 +4950,7 @@
             <a:pPr algn="ctr"/>
             <a:r>
               <a:rPr lang="en-GB" sz="2400" spc="300" dirty="0"/>
-              <a:t>2.77</a:t>
+              <a:t>2,77</a:t>
             </a:r>
           </a:p>
         </p:txBody>
@@ -5027,14 +5027,14 @@
             <a:pPr algn="r"/>
             <a:r>
               <a:rPr lang="en-GB" sz="2400" spc="300" dirty="0"/>
-              <a:t>0.43</a:t>
+              <a:t>0,43</a:t>
             </a:r>
           </a:p>
           <a:p>
             <a:pPr algn="r"/>
             <a:r>
               <a:rPr lang="en-GB" sz="2400" spc="300" dirty="0"/>
-              <a:t>−  0.25</a:t>
+              <a:t>−  0,25</a:t>
             </a:r>
           </a:p>
         </p:txBody>
@@ -5122,7 +5122,7 @@
             <a:pPr algn="ctr"/>
             <a:r>
               <a:rPr lang="en-GB" sz="2400" spc="300" dirty="0"/>
-              <a:t>0.18</a:t>
+              <a:t>0,18</a:t>
             </a:r>
           </a:p>
         </p:txBody>
@@ -5236,7 +5236,7 @@
             <a:pPr algn="r"/>
             <a:r>
               <a:rPr lang="en-GB" sz="2400" dirty="0"/>
-              <a:t>0.35 + 0.38</a:t>
+              <a:t>0,35 + 0,38</a:t>
             </a:r>
           </a:p>
         </p:txBody>
@@ -5279,7 +5279,7 @@
             <a:pPr algn="ctr"/>
             <a:r>
               <a:rPr lang="en-GB" sz="2400" dirty="0"/>
-              <a:t>= 0.73</a:t>
+              <a:t>= 0,73</a:t>
             </a:r>
           </a:p>
         </p:txBody>
@@ -5356,7 +5356,7 @@
             <a:pPr algn="r"/>
             <a:r>
               <a:rPr lang="en-GB" sz="2400" dirty="0"/>
-              <a:t>0.28 + 0.5 + 0.04</a:t>
+              <a:t>0,28 + 0,5 + 0,04</a:t>
             </a:r>
           </a:p>
         </p:txBody>
@@ -5399,7 +5399,7 @@
             <a:pPr algn="ctr"/>
             <a:r>
               <a:rPr lang="en-GB" sz="2400" dirty="0"/>
-              <a:t>= 0.82</a:t>
+              <a:t>= 0,82</a:t>
             </a:r>
           </a:p>
         </p:txBody>
@@ -5476,7 +5476,7 @@
             <a:pPr algn="r"/>
             <a:r>
               <a:rPr lang="en-GB" sz="2400" dirty="0"/>
-              <a:t>1.63 − 0.48</a:t>
+              <a:t>1,63 − 0,48</a:t>
             </a:r>
           </a:p>
         </p:txBody>
@@ -5519,7 +5519,7 @@
             <a:pPr algn="ctr"/>
             <a:r>
               <a:rPr lang="en-GB" sz="2400" dirty="0"/>
-              <a:t>= 1.15</a:t>
+              <a:t>= 1,15</a:t>
             </a:r>
           </a:p>
         </p:txBody>
@@ -5596,7 +5596,7 @@
             <a:pPr algn="r"/>
             <a:r>
               <a:rPr lang="en-GB" sz="2400" dirty="0"/>
-              <a:t>2.32 − 1.54</a:t>
+              <a:t>2,32 − 1,54</a:t>
             </a:r>
           </a:p>
         </p:txBody>
@@ -5639,7 +5639,7 @@
             <a:pPr algn="ctr"/>
             <a:r>
               <a:rPr lang="en-GB" sz="2400" dirty="0"/>
-              <a:t>= 0.78</a:t>
+              <a:t>= 0,78</a:t>
             </a:r>
           </a:p>
         </p:txBody>
@@ -5716,7 +5716,7 @@
             <a:pPr algn="r"/>
             <a:r>
               <a:rPr lang="en-GB" sz="2400" dirty="0"/>
-              <a:t>4.25 − 1.48 + 0.2</a:t>
+              <a:t>4,25 − 1,48 + 0,2</a:t>
             </a:r>
           </a:p>
         </p:txBody>
@@ -5759,7 +5759,7 @@
             <a:pPr algn="ctr"/>
             <a:r>
               <a:rPr lang="en-GB" sz="2400" dirty="0"/>
-              <a:t>= 2.97</a:t>
+              <a:t>= 2,97</a:t>
             </a:r>
           </a:p>
         </p:txBody>
@@ -5864,7 +5864,7 @@
                   <a:schemeClr val="tx1"/>
                 </a:solidFill>
               </a:rPr>
-              <a:t>4.91</a:t>
+              <a:t>4,91</a:t>
             </a:r>
           </a:p>
         </p:txBody>
@@ -5933,7 +5933,7 @@
                   <a:schemeClr val="tx1"/>
                 </a:solidFill>
               </a:rPr>
-              <a:t>2.17</a:t>
+              <a:t>2,17</a:t>
             </a:r>
           </a:p>
         </p:txBody>
@@ -6272,7 +6272,7 @@
             <a:pPr algn="ctr"/>
             <a:r>
               <a:rPr lang="en-GB" sz="2400" dirty="0"/>
-              <a:t>8.24</a:t>
+              <a:t>8,24</a:t>
             </a:r>
           </a:p>
         </p:txBody>
@@ -6418,7 +6418,7 @@
                   <a:schemeClr val="tx1"/>
                 </a:solidFill>
               </a:rPr>
-              <a:t>6.71</a:t>
+              <a:t>6,71</a:t>
             </a:r>
           </a:p>
         </p:txBody>
@@ -6487,7 +6487,7 @@
                   <a:schemeClr val="tx1"/>
                 </a:solidFill>
               </a:rPr>
-              <a:t>2.86</a:t>
+              <a:t>2,86</a:t>
             </a:r>
           </a:p>
         </p:txBody>
@@ -6826,7 +6826,7 @@
             <a:pPr algn="ctr"/>
             <a:r>
               <a:rPr lang="en-GB" sz="2400" dirty="0"/>
-              <a:t>2.08</a:t>
+              <a:t>2,08</a:t>
             </a:r>
           </a:p>
         </p:txBody>
